--- a/AI_for_Finance_Course/Slides/Class_06_Stress_Testing_Scenario_Analysis.pptx
+++ b/AI_for_Finance_Course/Slides/Class_06_Stress_Testing_Scenario_Analysis.pptx
@@ -500,6 +500,10 @@
           </p:nvPr>
         </p:nvSpPr>
         <p:spPr/>
+        <p:txBody>
+          <a:bodyPr/>
+          <a:p/>
+        </p:txBody>
       </p:sp>
       <p:sp>
         <p:nvSpPr>
@@ -588,6 +592,10 @@
           </p:nvPr>
         </p:nvSpPr>
         <p:spPr/>
+        <p:txBody>
+          <a:bodyPr/>
+          <a:p/>
+        </p:txBody>
       </p:sp>
       <p:sp>
         <p:nvSpPr>
@@ -676,6 +684,10 @@
           </p:nvPr>
         </p:nvSpPr>
         <p:spPr/>
+        <p:txBody>
+          <a:bodyPr/>
+          <a:p/>
+        </p:txBody>
       </p:sp>
       <p:sp>
         <p:nvSpPr>
@@ -764,6 +776,10 @@
           </p:nvPr>
         </p:nvSpPr>
         <p:spPr/>
+        <p:txBody>
+          <a:bodyPr/>
+          <a:p/>
+        </p:txBody>
       </p:sp>
       <p:sp>
         <p:nvSpPr>
@@ -852,6 +868,10 @@
           </p:nvPr>
         </p:nvSpPr>
         <p:spPr/>
+        <p:txBody>
+          <a:bodyPr/>
+          <a:p/>
+        </p:txBody>
       </p:sp>
       <p:sp>
         <p:nvSpPr>
@@ -940,6 +960,10 @@
           </p:nvPr>
         </p:nvSpPr>
         <p:spPr/>
+        <p:txBody>
+          <a:bodyPr/>
+          <a:p/>
+        </p:txBody>
       </p:sp>
       <p:sp>
         <p:nvSpPr>
@@ -1028,6 +1052,10 @@
           </p:nvPr>
         </p:nvSpPr>
         <p:spPr/>
+        <p:txBody>
+          <a:bodyPr/>
+          <a:p/>
+        </p:txBody>
       </p:sp>
       <p:sp>
         <p:nvSpPr>
@@ -1116,6 +1144,10 @@
           </p:nvPr>
         </p:nvSpPr>
         <p:spPr/>
+        <p:txBody>
+          <a:bodyPr/>
+          <a:p/>
+        </p:txBody>
       </p:sp>
       <p:sp>
         <p:nvSpPr>
@@ -1204,6 +1236,10 @@
           </p:nvPr>
         </p:nvSpPr>
         <p:spPr/>
+        <p:txBody>
+          <a:bodyPr/>
+          <a:p/>
+        </p:txBody>
       </p:sp>
       <p:sp>
         <p:nvSpPr>
@@ -1292,6 +1328,10 @@
           </p:nvPr>
         </p:nvSpPr>
         <p:spPr/>
+        <p:txBody>
+          <a:bodyPr/>
+          <a:p/>
+        </p:txBody>
       </p:sp>
       <p:sp>
         <p:nvSpPr>
@@ -1380,6 +1420,10 @@
           </p:nvPr>
         </p:nvSpPr>
         <p:spPr/>
+        <p:txBody>
+          <a:bodyPr/>
+          <a:p/>
+        </p:txBody>
       </p:sp>
       <p:sp>
         <p:nvSpPr>
@@ -1468,6 +1512,10 @@
           </p:nvPr>
         </p:nvSpPr>
         <p:spPr/>
+        <p:txBody>
+          <a:bodyPr/>
+          <a:p/>
+        </p:txBody>
       </p:sp>
       <p:sp>
         <p:nvSpPr>
@@ -1556,6 +1604,10 @@
           </p:nvPr>
         </p:nvSpPr>
         <p:spPr/>
+        <p:txBody>
+          <a:bodyPr/>
+          <a:p/>
+        </p:txBody>
       </p:sp>
       <p:sp>
         <p:nvSpPr>
@@ -1644,6 +1696,10 @@
           </p:nvPr>
         </p:nvSpPr>
         <p:spPr/>
+        <p:txBody>
+          <a:bodyPr/>
+          <a:p/>
+        </p:txBody>
       </p:sp>
       <p:sp>
         <p:nvSpPr>
@@ -1732,6 +1788,10 @@
           </p:nvPr>
         </p:nvSpPr>
         <p:spPr/>
+        <p:txBody>
+          <a:bodyPr/>
+          <a:p/>
+        </p:txBody>
       </p:sp>
       <p:sp>
         <p:nvSpPr>
@@ -1820,6 +1880,10 @@
           </p:nvPr>
         </p:nvSpPr>
         <p:spPr/>
+        <p:txBody>
+          <a:bodyPr/>
+          <a:p/>
+        </p:txBody>
       </p:sp>
       <p:sp>
         <p:nvSpPr>
@@ -1908,6 +1972,10 @@
           </p:nvPr>
         </p:nvSpPr>
         <p:spPr/>
+        <p:txBody>
+          <a:bodyPr/>
+          <a:p/>
+        </p:txBody>
       </p:sp>
       <p:sp>
         <p:nvSpPr>
@@ -2474,6 +2542,10 @@
           </a:solidFill>
           <a:ln/>
         </p:spPr>
+        <p:txBody>
+          <a:bodyPr/>
+          <a:p/>
+        </p:txBody>
       </p:sp>
     </p:spTree>
   </p:cSld>
@@ -2526,6 +2598,10 @@
           </a:solidFill>
           <a:ln/>
         </p:spPr>
+        <p:txBody>
+          <a:bodyPr/>
+          <a:p/>
+        </p:txBody>
       </p:sp>
       <p:sp>
         <p:nvSpPr>
@@ -2856,6 +2932,10 @@
           </a:solidFill>
           <a:ln/>
         </p:spPr>
+        <p:txBody>
+          <a:bodyPr/>
+          <a:p/>
+        </p:txBody>
       </p:sp>
       <p:sp>
         <p:nvSpPr>
@@ -3120,6 +3200,10 @@
             <a:prstDash val="solid"/>
           </a:ln>
         </p:spPr>
+        <p:txBody>
+          <a:bodyPr/>
+          <a:p/>
+        </p:txBody>
       </p:sp>
       <p:sp>
         <p:nvSpPr>
@@ -3319,6 +3403,10 @@
           </a:solidFill>
           <a:ln/>
         </p:spPr>
+        <p:txBody>
+          <a:bodyPr/>
+          <a:p/>
+        </p:txBody>
       </p:sp>
       <p:sp>
         <p:nvSpPr>
@@ -3649,6 +3737,10 @@
           </a:solidFill>
           <a:ln/>
         </p:spPr>
+        <p:txBody>
+          <a:bodyPr/>
+          <a:p/>
+        </p:txBody>
       </p:sp>
       <p:sp>
         <p:nvSpPr>
@@ -3979,6 +4071,10 @@
           </a:solidFill>
           <a:ln/>
         </p:spPr>
+        <p:txBody>
+          <a:bodyPr/>
+          <a:p/>
+        </p:txBody>
       </p:sp>
       <p:sp>
         <p:nvSpPr>
@@ -4309,6 +4405,10 @@
           </a:solidFill>
           <a:ln/>
         </p:spPr>
+        <p:txBody>
+          <a:bodyPr/>
+          <a:p/>
+        </p:txBody>
       </p:sp>
       <p:sp>
         <p:nvSpPr>
@@ -4639,6 +4739,10 @@
           </a:solidFill>
           <a:ln/>
         </p:spPr>
+        <p:txBody>
+          <a:bodyPr/>
+          <a:p/>
+        </p:txBody>
       </p:sp>
       <p:sp>
         <p:nvSpPr>
@@ -5022,7 +5126,7 @@
                 <a:ea typeface="Calibri" pitchFamily="34" charset="-122"/>
                 <a:cs typeface="Calibri" pitchFamily="34" charset="-120"/>
               </a:rPr>
-              <a:t>Proxiant Academy — www.proxiant.com</a:t>
+              <a:t>Proxiant Academy | proxiant.ai</a:t>
             </a:r>
             <a:endParaRPr lang="en-US" sz="1400" dirty="0"/>
           </a:p>
@@ -5118,6 +5222,10 @@
           </a:solidFill>
           <a:ln/>
         </p:spPr>
+        <p:txBody>
+          <a:bodyPr/>
+          <a:p/>
+        </p:txBody>
       </p:sp>
       <p:sp>
         <p:nvSpPr>
@@ -5177,6 +5285,10 @@
           </a:solidFill>
           <a:ln/>
         </p:spPr>
+        <p:txBody>
+          <a:bodyPr/>
+          <a:p/>
+        </p:txBody>
       </p:sp>
       <p:sp>
         <p:nvSpPr>
@@ -5275,6 +5387,10 @@
           </a:solidFill>
           <a:ln/>
         </p:spPr>
+        <p:txBody>
+          <a:bodyPr/>
+          <a:p/>
+        </p:txBody>
       </p:sp>
       <p:sp>
         <p:nvSpPr>
@@ -5373,6 +5489,10 @@
           </a:solidFill>
           <a:ln/>
         </p:spPr>
+        <p:txBody>
+          <a:bodyPr/>
+          <a:p/>
+        </p:txBody>
       </p:sp>
       <p:sp>
         <p:nvSpPr>
@@ -5471,6 +5591,10 @@
           </a:solidFill>
           <a:ln/>
         </p:spPr>
+        <p:txBody>
+          <a:bodyPr/>
+          <a:p/>
+        </p:txBody>
       </p:sp>
       <p:sp>
         <p:nvSpPr>
@@ -5569,6 +5693,10 @@
           </a:solidFill>
           <a:ln/>
         </p:spPr>
+        <p:txBody>
+          <a:bodyPr/>
+          <a:p/>
+        </p:txBody>
       </p:sp>
       <p:sp>
         <p:nvSpPr>
@@ -5738,6 +5866,10 @@
           </a:solidFill>
           <a:ln/>
         </p:spPr>
+        <p:txBody>
+          <a:bodyPr/>
+          <a:p/>
+        </p:txBody>
       </p:sp>
       <p:sp>
         <p:nvSpPr>
@@ -6067,6 +6199,10 @@
           </a:solidFill>
           <a:ln/>
         </p:spPr>
+        <p:txBody>
+          <a:bodyPr/>
+          <a:p/>
+        </p:txBody>
       </p:sp>
       <p:sp>
         <p:nvSpPr>
@@ -6397,6 +6533,10 @@
           </a:solidFill>
           <a:ln/>
         </p:spPr>
+        <p:txBody>
+          <a:bodyPr/>
+          <a:p/>
+        </p:txBody>
       </p:sp>
       <p:sp>
         <p:nvSpPr>
@@ -6661,6 +6801,10 @@
             <a:prstDash val="solid"/>
           </a:ln>
         </p:spPr>
+        <p:txBody>
+          <a:bodyPr/>
+          <a:p/>
+        </p:txBody>
       </p:sp>
       <p:sp>
         <p:nvSpPr>
@@ -6860,6 +7004,10 @@
           </a:solidFill>
           <a:ln/>
         </p:spPr>
+        <p:txBody>
+          <a:bodyPr/>
+          <a:p/>
+        </p:txBody>
       </p:sp>
       <p:sp>
         <p:nvSpPr>
@@ -7190,6 +7338,10 @@
           </a:solidFill>
           <a:ln/>
         </p:spPr>
+        <p:txBody>
+          <a:bodyPr/>
+          <a:p/>
+        </p:txBody>
       </p:sp>
       <p:sp>
         <p:nvSpPr>
@@ -7520,6 +7672,10 @@
           </a:solidFill>
           <a:ln/>
         </p:spPr>
+        <p:txBody>
+          <a:bodyPr/>
+          <a:p/>
+        </p:txBody>
       </p:sp>
       <p:sp>
         <p:nvSpPr>
@@ -7850,6 +8006,10 @@
           </a:solidFill>
           <a:ln/>
         </p:spPr>
+        <p:txBody>
+          <a:bodyPr/>
+          <a:p/>
+        </p:txBody>
       </p:sp>
       <p:sp>
         <p:nvSpPr>
